--- a/contents/Module-08-SQL-Server-Agent-and-Automation.pptx
+++ b/contents/Module-08-SQL-Server-Agent-and-Automation.pptx
@@ -4960,7 +4960,7 @@
         </p:nvSpPr>
         <p:spPr>
           <a:xfrm>
-            <a:off x="320040" y="6446520"/>
+            <a:off x="320040" y="6144768"/>
             <a:ext cx="11521440" cy="256032"/>
           </a:xfrm>
           <a:prstGeom prst="rect">
@@ -7021,7 +7021,7 @@
           <a:lstStyle/>
           <a:p>
             <a:r>
-              <a:rPr sz="1100">
+              <a:rPr sz="1000">
                 <a:solidFill>
                   <a:srgbClr val="A8D8FF"/>
                 </a:solidFill>
